--- a/tests/OfficeAgent.Tests/Corpus/v1.0.0/native/outputs/p-duplicateslide.pptx
+++ b/tests/OfficeAgent.Tests/Corpus/v1.0.0/native/outputs/p-duplicateslide.pptx
@@ -2,13 +2,13 @@
 <file path=ppt/presentation.xml><?xml version="1.0" encoding="utf-8"?>
 <p:presentation xmlns:r="http://schemas.openxmlformats.org/officeDocument/2006/relationships" xmlns:p="http://schemas.openxmlformats.org/presentationml/2006/main">
   <p:sldMasterIdLst>
-    <p:sldMasterId xmlns:r="http://schemas.openxmlformats.org/officeDocument/2006/relationships" id="2147483648" r:id="R0ab58c605feb4204"/>
+    <p:sldMasterId xmlns:r="http://schemas.openxmlformats.org/officeDocument/2006/relationships" id="2147483648" r:id="R76bda88eb0624f9d"/>
   </p:sldMasterIdLst>
   <p:sldIdLst>
-    <p:sldId xmlns:r="http://schemas.openxmlformats.org/officeDocument/2006/relationships" id="256" r:id="R33962d7d4f714ce4"/>
-    <p:sldId id="257" r:id="R3e7d0a5869754182"/>
-    <p:sldId id="259" r:id="Rd279439b3cc34c43"/>
-    <p:sldId id="258" r:id="Re5a9dc5d4eaf4c80"/>
+    <p:sldId xmlns:r="http://schemas.openxmlformats.org/officeDocument/2006/relationships" id="256" r:id="R684ffe9accf445f1"/>
+    <p:sldId id="257" r:id="R3c5854fdf73e416f"/>
+    <p:sldId id="259" r:id="R9180af8925fa4838"/>
+    <p:sldId id="258" r:id="R6494006b594349d1"/>
   </p:sldIdLst>
   <p:sldSz cx="12192000" cy="6858000"/>
   <p:notesSz cx="6858000" cy="9144000"/>
@@ -389,11 +389,11 @@
   </p:cSld>
   <p:clrMap bg1="lt1" tx1="dk1" bg2="lt2" tx2="dk2" accent1="accent1" accent2="accent2" accent3="accent3" accent4="accent4" accent5="accent5" accent6="accent6" hlink="hlink" folHlink="folHlink"/>
   <p:sldLayoutIdLst>
-    <p:sldLayoutId xmlns:r="http://schemas.openxmlformats.org/officeDocument/2006/relationships" id="2147483649" r:id="Ra670d069709940c5"/>
-    <p:sldLayoutId xmlns:r="http://schemas.openxmlformats.org/officeDocument/2006/relationships" id="2147483650" r:id="R1b1005d2313a4b86"/>
-    <p:sldLayoutId xmlns:r="http://schemas.openxmlformats.org/officeDocument/2006/relationships" id="2147483651" r:id="R9531f8f9386f4fbd"/>
-    <p:sldLayoutId xmlns:r="http://schemas.openxmlformats.org/officeDocument/2006/relationships" id="2147483652" r:id="Rdffa033a6084425a"/>
-    <p:sldLayoutId xmlns:r="http://schemas.openxmlformats.org/officeDocument/2006/relationships" id="2147483653" r:id="Rd39fb83ad9044654"/>
+    <p:sldLayoutId xmlns:r="http://schemas.openxmlformats.org/officeDocument/2006/relationships" id="2147483649" r:id="Ra872dfd9a6a64976"/>
+    <p:sldLayoutId xmlns:r="http://schemas.openxmlformats.org/officeDocument/2006/relationships" id="2147483650" r:id="R3d95fb8d3b334987"/>
+    <p:sldLayoutId xmlns:r="http://schemas.openxmlformats.org/officeDocument/2006/relationships" id="2147483651" r:id="R8d019356bb65479d"/>
+    <p:sldLayoutId xmlns:r="http://schemas.openxmlformats.org/officeDocument/2006/relationships" id="2147483652" r:id="R5f8f9cd40d5c4934"/>
+    <p:sldLayoutId xmlns:r="http://schemas.openxmlformats.org/officeDocument/2006/relationships" id="2147483653" r:id="Rfd775e80255e4975"/>
   </p:sldLayoutIdLst>
 </p:sldMaster>
 </file>

--- a/tests/OfficeAgent.Tests/Corpus/v1.0.0/native/outputs/p-duplicateslide.pptx
+++ b/tests/OfficeAgent.Tests/Corpus/v1.0.0/native/outputs/p-duplicateslide.pptx
@@ -2,13 +2,13 @@
 <file path=ppt/presentation.xml><?xml version="1.0" encoding="utf-8"?>
 <p:presentation xmlns:r="http://schemas.openxmlformats.org/officeDocument/2006/relationships" xmlns:p="http://schemas.openxmlformats.org/presentationml/2006/main">
   <p:sldMasterIdLst>
-    <p:sldMasterId xmlns:r="http://schemas.openxmlformats.org/officeDocument/2006/relationships" id="2147483648" r:id="R76bda88eb0624f9d"/>
+    <p:sldMasterId xmlns:r="http://schemas.openxmlformats.org/officeDocument/2006/relationships" id="2147483648" r:id="R570c7f128a9d41bd"/>
   </p:sldMasterIdLst>
   <p:sldIdLst>
-    <p:sldId xmlns:r="http://schemas.openxmlformats.org/officeDocument/2006/relationships" id="256" r:id="R684ffe9accf445f1"/>
-    <p:sldId id="257" r:id="R3c5854fdf73e416f"/>
-    <p:sldId id="259" r:id="R9180af8925fa4838"/>
-    <p:sldId id="258" r:id="R6494006b594349d1"/>
+    <p:sldId xmlns:r="http://schemas.openxmlformats.org/officeDocument/2006/relationships" id="256" r:id="R99ef8e78f19b43dd"/>
+    <p:sldId id="257" r:id="R93104dc9e1204b9f"/>
+    <p:sldId id="259" r:id="R964de0fd5f5e4c51"/>
+    <p:sldId id="258" r:id="Rbefaa6c0b4f942e3"/>
   </p:sldIdLst>
   <p:sldSz cx="12192000" cy="6858000"/>
   <p:notesSz cx="6858000" cy="9144000"/>
@@ -389,11 +389,11 @@
   </p:cSld>
   <p:clrMap bg1="lt1" tx1="dk1" bg2="lt2" tx2="dk2" accent1="accent1" accent2="accent2" accent3="accent3" accent4="accent4" accent5="accent5" accent6="accent6" hlink="hlink" folHlink="folHlink"/>
   <p:sldLayoutIdLst>
-    <p:sldLayoutId xmlns:r="http://schemas.openxmlformats.org/officeDocument/2006/relationships" id="2147483649" r:id="Ra872dfd9a6a64976"/>
-    <p:sldLayoutId xmlns:r="http://schemas.openxmlformats.org/officeDocument/2006/relationships" id="2147483650" r:id="R3d95fb8d3b334987"/>
-    <p:sldLayoutId xmlns:r="http://schemas.openxmlformats.org/officeDocument/2006/relationships" id="2147483651" r:id="R8d019356bb65479d"/>
-    <p:sldLayoutId xmlns:r="http://schemas.openxmlformats.org/officeDocument/2006/relationships" id="2147483652" r:id="R5f8f9cd40d5c4934"/>
-    <p:sldLayoutId xmlns:r="http://schemas.openxmlformats.org/officeDocument/2006/relationships" id="2147483653" r:id="Rfd775e80255e4975"/>
+    <p:sldLayoutId xmlns:r="http://schemas.openxmlformats.org/officeDocument/2006/relationships" id="2147483649" r:id="R25cb8f6de14f42bd"/>
+    <p:sldLayoutId xmlns:r="http://schemas.openxmlformats.org/officeDocument/2006/relationships" id="2147483650" r:id="R337b6e4ee03742c7"/>
+    <p:sldLayoutId xmlns:r="http://schemas.openxmlformats.org/officeDocument/2006/relationships" id="2147483651" r:id="R00654b90173242ee"/>
+    <p:sldLayoutId xmlns:r="http://schemas.openxmlformats.org/officeDocument/2006/relationships" id="2147483652" r:id="R9f49a021cc9e49c6"/>
+    <p:sldLayoutId xmlns:r="http://schemas.openxmlformats.org/officeDocument/2006/relationships" id="2147483653" r:id="R1021dc56617a49e8"/>
   </p:sldLayoutIdLst>
 </p:sldMaster>
 </file>

--- a/tests/OfficeAgent.Tests/Corpus/v1.0.0/native/outputs/p-duplicateslide.pptx
+++ b/tests/OfficeAgent.Tests/Corpus/v1.0.0/native/outputs/p-duplicateslide.pptx
@@ -2,13 +2,13 @@
 <file path=ppt/presentation.xml><?xml version="1.0" encoding="utf-8"?>
 <p:presentation xmlns:r="http://schemas.openxmlformats.org/officeDocument/2006/relationships" xmlns:p="http://schemas.openxmlformats.org/presentationml/2006/main">
   <p:sldMasterIdLst>
-    <p:sldMasterId xmlns:r="http://schemas.openxmlformats.org/officeDocument/2006/relationships" id="2147483648" r:id="R570c7f128a9d41bd"/>
+    <p:sldMasterId xmlns:r="http://schemas.openxmlformats.org/officeDocument/2006/relationships" id="2147483648" r:id="R8671b82465b14567"/>
   </p:sldMasterIdLst>
   <p:sldIdLst>
-    <p:sldId xmlns:r="http://schemas.openxmlformats.org/officeDocument/2006/relationships" id="256" r:id="R99ef8e78f19b43dd"/>
-    <p:sldId id="257" r:id="R93104dc9e1204b9f"/>
-    <p:sldId id="259" r:id="R964de0fd5f5e4c51"/>
-    <p:sldId id="258" r:id="Rbefaa6c0b4f942e3"/>
+    <p:sldId xmlns:r="http://schemas.openxmlformats.org/officeDocument/2006/relationships" id="256" r:id="Rf6094db747aa49ac"/>
+    <p:sldId id="257" r:id="Rb0ad968aa62a4d22"/>
+    <p:sldId id="259" r:id="R9f8f6e69109642e5"/>
+    <p:sldId id="258" r:id="Redc77fc1bad94598"/>
   </p:sldIdLst>
   <p:sldSz cx="12192000" cy="6858000"/>
   <p:notesSz cx="6858000" cy="9144000"/>
@@ -389,11 +389,11 @@
   </p:cSld>
   <p:clrMap bg1="lt1" tx1="dk1" bg2="lt2" tx2="dk2" accent1="accent1" accent2="accent2" accent3="accent3" accent4="accent4" accent5="accent5" accent6="accent6" hlink="hlink" folHlink="folHlink"/>
   <p:sldLayoutIdLst>
-    <p:sldLayoutId xmlns:r="http://schemas.openxmlformats.org/officeDocument/2006/relationships" id="2147483649" r:id="R25cb8f6de14f42bd"/>
-    <p:sldLayoutId xmlns:r="http://schemas.openxmlformats.org/officeDocument/2006/relationships" id="2147483650" r:id="R337b6e4ee03742c7"/>
-    <p:sldLayoutId xmlns:r="http://schemas.openxmlformats.org/officeDocument/2006/relationships" id="2147483651" r:id="R00654b90173242ee"/>
-    <p:sldLayoutId xmlns:r="http://schemas.openxmlformats.org/officeDocument/2006/relationships" id="2147483652" r:id="R9f49a021cc9e49c6"/>
-    <p:sldLayoutId xmlns:r="http://schemas.openxmlformats.org/officeDocument/2006/relationships" id="2147483653" r:id="R1021dc56617a49e8"/>
+    <p:sldLayoutId xmlns:r="http://schemas.openxmlformats.org/officeDocument/2006/relationships" id="2147483649" r:id="R076690fbe9a04b4c"/>
+    <p:sldLayoutId xmlns:r="http://schemas.openxmlformats.org/officeDocument/2006/relationships" id="2147483650" r:id="Rcbbc7ec846664271"/>
+    <p:sldLayoutId xmlns:r="http://schemas.openxmlformats.org/officeDocument/2006/relationships" id="2147483651" r:id="Rcdfa314a6eb245f8"/>
+    <p:sldLayoutId xmlns:r="http://schemas.openxmlformats.org/officeDocument/2006/relationships" id="2147483652" r:id="R5eb83d97f29c418f"/>
+    <p:sldLayoutId xmlns:r="http://schemas.openxmlformats.org/officeDocument/2006/relationships" id="2147483653" r:id="R88ec123f8c51445d"/>
   </p:sldLayoutIdLst>
 </p:sldMaster>
 </file>

--- a/tests/OfficeAgent.Tests/Corpus/v1.0.0/native/outputs/p-duplicateslide.pptx
+++ b/tests/OfficeAgent.Tests/Corpus/v1.0.0/native/outputs/p-duplicateslide.pptx
@@ -2,13 +2,13 @@
 <file path=ppt/presentation.xml><?xml version="1.0" encoding="utf-8"?>
 <p:presentation xmlns:r="http://schemas.openxmlformats.org/officeDocument/2006/relationships" xmlns:p="http://schemas.openxmlformats.org/presentationml/2006/main">
   <p:sldMasterIdLst>
-    <p:sldMasterId xmlns:r="http://schemas.openxmlformats.org/officeDocument/2006/relationships" id="2147483648" r:id="R8671b82465b14567"/>
+    <p:sldMasterId xmlns:r="http://schemas.openxmlformats.org/officeDocument/2006/relationships" id="2147483648" r:id="R9e7bfc662c7043e1"/>
   </p:sldMasterIdLst>
   <p:sldIdLst>
-    <p:sldId xmlns:r="http://schemas.openxmlformats.org/officeDocument/2006/relationships" id="256" r:id="Rf6094db747aa49ac"/>
-    <p:sldId id="257" r:id="Rb0ad968aa62a4d22"/>
-    <p:sldId id="259" r:id="R9f8f6e69109642e5"/>
-    <p:sldId id="258" r:id="Redc77fc1bad94598"/>
+    <p:sldId xmlns:r="http://schemas.openxmlformats.org/officeDocument/2006/relationships" id="256" r:id="Rb6a1431c92cc431c"/>
+    <p:sldId id="257" r:id="R989073af708c4124"/>
+    <p:sldId id="259" r:id="Rc2cd689300a0448a"/>
+    <p:sldId id="258" r:id="R2ecf014040db438a"/>
   </p:sldIdLst>
   <p:sldSz cx="12192000" cy="6858000"/>
   <p:notesSz cx="6858000" cy="9144000"/>
@@ -389,11 +389,11 @@
   </p:cSld>
   <p:clrMap bg1="lt1" tx1="dk1" bg2="lt2" tx2="dk2" accent1="accent1" accent2="accent2" accent3="accent3" accent4="accent4" accent5="accent5" accent6="accent6" hlink="hlink" folHlink="folHlink"/>
   <p:sldLayoutIdLst>
-    <p:sldLayoutId xmlns:r="http://schemas.openxmlformats.org/officeDocument/2006/relationships" id="2147483649" r:id="R076690fbe9a04b4c"/>
-    <p:sldLayoutId xmlns:r="http://schemas.openxmlformats.org/officeDocument/2006/relationships" id="2147483650" r:id="Rcbbc7ec846664271"/>
-    <p:sldLayoutId xmlns:r="http://schemas.openxmlformats.org/officeDocument/2006/relationships" id="2147483651" r:id="Rcdfa314a6eb245f8"/>
-    <p:sldLayoutId xmlns:r="http://schemas.openxmlformats.org/officeDocument/2006/relationships" id="2147483652" r:id="R5eb83d97f29c418f"/>
-    <p:sldLayoutId xmlns:r="http://schemas.openxmlformats.org/officeDocument/2006/relationships" id="2147483653" r:id="R88ec123f8c51445d"/>
+    <p:sldLayoutId xmlns:r="http://schemas.openxmlformats.org/officeDocument/2006/relationships" id="2147483649" r:id="R076197da0cee4335"/>
+    <p:sldLayoutId xmlns:r="http://schemas.openxmlformats.org/officeDocument/2006/relationships" id="2147483650" r:id="R60a01585d94244c1"/>
+    <p:sldLayoutId xmlns:r="http://schemas.openxmlformats.org/officeDocument/2006/relationships" id="2147483651" r:id="Rb3ea08b37e1f45c1"/>
+    <p:sldLayoutId xmlns:r="http://schemas.openxmlformats.org/officeDocument/2006/relationships" id="2147483652" r:id="Rd3b60acc5f60447a"/>
+    <p:sldLayoutId xmlns:r="http://schemas.openxmlformats.org/officeDocument/2006/relationships" id="2147483653" r:id="Rd7c829a3c47a4cfb"/>
   </p:sldLayoutIdLst>
 </p:sldMaster>
 </file>

--- a/tests/OfficeAgent.Tests/Corpus/v1.0.0/native/outputs/p-duplicateslide.pptx
+++ b/tests/OfficeAgent.Tests/Corpus/v1.0.0/native/outputs/p-duplicateslide.pptx
@@ -2,13 +2,13 @@
 <file path=ppt/presentation.xml><?xml version="1.0" encoding="utf-8"?>
 <p:presentation xmlns:r="http://schemas.openxmlformats.org/officeDocument/2006/relationships" xmlns:p="http://schemas.openxmlformats.org/presentationml/2006/main">
   <p:sldMasterIdLst>
-    <p:sldMasterId xmlns:r="http://schemas.openxmlformats.org/officeDocument/2006/relationships" id="2147483648" r:id="R9e7bfc662c7043e1"/>
+    <p:sldMasterId xmlns:r="http://schemas.openxmlformats.org/officeDocument/2006/relationships" id="2147483648" r:id="R3a5f915cdc724fcc"/>
   </p:sldMasterIdLst>
   <p:sldIdLst>
-    <p:sldId xmlns:r="http://schemas.openxmlformats.org/officeDocument/2006/relationships" id="256" r:id="Rb6a1431c92cc431c"/>
-    <p:sldId id="257" r:id="R989073af708c4124"/>
-    <p:sldId id="259" r:id="Rc2cd689300a0448a"/>
-    <p:sldId id="258" r:id="R2ecf014040db438a"/>
+    <p:sldId xmlns:r="http://schemas.openxmlformats.org/officeDocument/2006/relationships" id="256" r:id="Rd693be35b6e842fa"/>
+    <p:sldId id="257" r:id="R6f3c2efa48394b41"/>
+    <p:sldId id="259" r:id="Rf4312104149f4993"/>
+    <p:sldId id="258" r:id="Rf37e43e42fcc4855"/>
   </p:sldIdLst>
   <p:sldSz cx="12192000" cy="6858000"/>
   <p:notesSz cx="6858000" cy="9144000"/>
@@ -172,7 +172,7 @@
 </file>
 
 <file path=ppt/slideLayouts/slideLayout3.xml><?xml version="1.0" encoding="utf-8"?>
-<p:sldLayout xmlns:p="http://schemas.openxmlformats.org/presentationml/2006/main" type="secHead">
+<p:sldLayout xmlns:a="http://schemas.openxmlformats.org/drawingml/2006/main" xmlns:p="http://schemas.openxmlformats.org/presentationml/2006/main" type="secHead">
   <p:cSld name="Section Header">
     <p:spTree>
       <p:nvGrpSpPr>
@@ -250,7 +250,7 @@
 </file>
 
 <file path=ppt/slideLayouts/slideLayout4.xml><?xml version="1.0" encoding="utf-8"?>
-<p:sldLayout xmlns:p="http://schemas.openxmlformats.org/presentationml/2006/main" type="titleOnly">
+<p:sldLayout xmlns:a="http://schemas.openxmlformats.org/drawingml/2006/main" xmlns:p="http://schemas.openxmlformats.org/presentationml/2006/main" type="titleOnly">
   <p:cSld name="Title Only">
     <p:spTree>
       <p:nvGrpSpPr>
@@ -298,7 +298,7 @@
 </file>
 
 <file path=ppt/slideLayouts/slideLayout5.xml><?xml version="1.0" encoding="utf-8"?>
-<p:sldLayout xmlns:p="http://schemas.openxmlformats.org/presentationml/2006/main" type="blank">
+<p:sldLayout xmlns:a="http://schemas.openxmlformats.org/drawingml/2006/main" xmlns:p="http://schemas.openxmlformats.org/presentationml/2006/main" type="blank">
   <p:cSld name="Blank">
     <p:spTree>
       <p:nvGrpSpPr>
@@ -316,7 +316,7 @@
 </file>
 
 <file path=ppt/slideMasters/slideMaster1.xml><?xml version="1.0" encoding="utf-8"?>
-<p:sldMaster xmlns:p="http://schemas.openxmlformats.org/presentationml/2006/main">
+<p:sldMaster xmlns:a="http://schemas.openxmlformats.org/drawingml/2006/main" xmlns:r="http://schemas.openxmlformats.org/officeDocument/2006/relationships" xmlns:p="http://schemas.openxmlformats.org/presentationml/2006/main">
   <p:cSld>
     <p:spTree>
       <p:nvGrpSpPr>
@@ -389,11 +389,11 @@
   </p:cSld>
   <p:clrMap bg1="lt1" tx1="dk1" bg2="lt2" tx2="dk2" accent1="accent1" accent2="accent2" accent3="accent3" accent4="accent4" accent5="accent5" accent6="accent6" hlink="hlink" folHlink="folHlink"/>
   <p:sldLayoutIdLst>
-    <p:sldLayoutId xmlns:r="http://schemas.openxmlformats.org/officeDocument/2006/relationships" id="2147483649" r:id="R076197da0cee4335"/>
-    <p:sldLayoutId xmlns:r="http://schemas.openxmlformats.org/officeDocument/2006/relationships" id="2147483650" r:id="R60a01585d94244c1"/>
-    <p:sldLayoutId xmlns:r="http://schemas.openxmlformats.org/officeDocument/2006/relationships" id="2147483651" r:id="Rb3ea08b37e1f45c1"/>
-    <p:sldLayoutId xmlns:r="http://schemas.openxmlformats.org/officeDocument/2006/relationships" id="2147483652" r:id="Rd3b60acc5f60447a"/>
-    <p:sldLayoutId xmlns:r="http://schemas.openxmlformats.org/officeDocument/2006/relationships" id="2147483653" r:id="Rd7c829a3c47a4cfb"/>
+    <p:sldLayoutId xmlns:r="http://schemas.openxmlformats.org/officeDocument/2006/relationships" id="2147483649" r:id="R15038d8875d343d2"/>
+    <p:sldLayoutId xmlns:r="http://schemas.openxmlformats.org/officeDocument/2006/relationships" id="2147483650" r:id="Raa4cbfd07f3a4e0b"/>
+    <p:sldLayoutId xmlns:r="http://schemas.openxmlformats.org/officeDocument/2006/relationships" id="2147483651" r:id="Re02f4407ef2f4fac"/>
+    <p:sldLayoutId xmlns:r="http://schemas.openxmlformats.org/officeDocument/2006/relationships" id="2147483652" r:id="R4079cae215cd45e6"/>
+    <p:sldLayoutId xmlns:r="http://schemas.openxmlformats.org/officeDocument/2006/relationships" id="2147483653" r:id="R04499f5e7fe64b44"/>
   </p:sldLayoutIdLst>
 </p:sldMaster>
 </file>
